--- a/slide/Pelatihan-GitHub-IDTC-Sesi2.pptx
+++ b/slide/Pelatihan-GitHub-IDTC-Sesi2.pptx
@@ -2048,7 +2048,7 @@
                 <a:ea typeface="Calibri" pitchFamily="34" charset="-122"/>
                 <a:cs typeface="Calibri" pitchFamily="34" charset="-120"/>
               </a:rPr>
-              <a:t>Tidak perlu kemampuan pemrograman — seluruh materi dikerjakan lewat peramban.</a:t>
+              <a:t>Tidak perlu kemampuan pemrograman — seluruh materi dikerjakan lewat browser.</a:t>
             </a:r>
             <a:endParaRPr lang="en-US" sz="1300" dirty="0"/>
           </a:p>
@@ -3289,7 +3289,7 @@
                 <a:ea typeface="Calibri" pitchFamily="34" charset="-122"/>
                 <a:cs typeface="Calibri" pitchFamily="34" charset="-120"/>
               </a:rPr>
-              <a:t>Anda bisa mengubah dokumen lewat peramban dan mengajukannya sebagai Pull Request</a:t>
+              <a:t>Anda bisa mengubah dokumen lewat browser dan mengajukannya sebagai Pull Request</a:t>
             </a:r>
             <a:endParaRPr lang="en-US" sz="1300" dirty="0"/>
           </a:p>
@@ -3671,7 +3671,7 @@
                 <a:ea typeface="Calibri" pitchFamily="34" charset="-122"/>
                 <a:cs typeface="Calibri" pitchFamily="34" charset="-120"/>
               </a:rPr>
-              <a:t>Mengubah Dokumen Lewat Peramban</a:t>
+              <a:t>Mengubah Dokumen Lewat Browser</a:t>
             </a:r>
             <a:endParaRPr lang="en-US" sz="1350" dirty="0"/>
           </a:p>
@@ -4148,7 +4148,7 @@
                 <a:ea typeface="Calibri" pitchFamily="34" charset="-122"/>
                 <a:cs typeface="Calibri" pitchFamily="34" charset="-120"/>
               </a:rPr>
-              <a:t>Mengubah Dokumen Lewat Peramban</a:t>
+              <a:t>Mengubah Dokumen Lewat Browser</a:t>
             </a:r>
             <a:endParaRPr lang="en-US" sz="3000" dirty="0"/>
           </a:p>
@@ -4296,7 +4296,7 @@
                 <a:ea typeface="Calibri" pitchFamily="34" charset="-122"/>
                 <a:cs typeface="Calibri" pitchFamily="34" charset="-120"/>
               </a:rPr>
-              <a:t>Mengubah satu berkas Markdown lewat peramban</a:t>
+              <a:t>Mengubah satu berkas Markdown lewat browser</a:t>
             </a:r>
             <a:endParaRPr lang="en-US" sz="1300" dirty="0"/>
           </a:p>
